--- a/test/F1_Query_Flow.pptx
+++ b/test/F1_Query_Flow.pptx
@@ -4362,8 +4362,9 @@
                   <a:srgbClr val="175CA6"/>
                 </a:solidFill>
               </a:rPr>
-              <a:t>prompt +
-full history</a:t>
+              <a:t>SYSTEM_PROMPT
++ snapshot
++ history</a:t>
             </a:r>
           </a:p>
         </p:txBody>
@@ -4993,7 +4994,7 @@
                   <a:srgbClr val="444444"/>
                 </a:solidFill>
               </a:rPr>
-              <a:t>HTTP POST {session, message} to Orchestrator /chat</a:t>
+              <a:t>HTTP POST {session_id, message} → Orchestrator /chat  (pure stdlib urllib; --session flag)</a:t>
             </a:r>
           </a:p>
         </p:txBody>
@@ -5185,7 +5186,7 @@
                   <a:srgbClr val="444444"/>
                 </a:solidFill>
               </a:rPr>
-              <a:t>Injects conversation history including plan_network result</a:t>
+              <a:t>Calls build_network_context() → GET /network; appends snapshot to SYSTEM_PROMPT</a:t>
             </a:r>
           </a:p>
         </p:txBody>
@@ -5284,7 +5285,7 @@
             <a:avLst/>
           </a:prstGeom>
           <a:solidFill>
-            <a:srgbClr val="5A238C"/>
+            <a:srgbClr val="0A2955"/>
           </a:solidFill>
           <a:ln w="3810">
             <a:solidFill>
@@ -5343,7 +5344,7 @@
                   <a:srgbClr val="FFFFFF"/>
                 </a:solidFill>
               </a:rPr>
-              <a:t>Gemini LLM</a:t>
+              <a:t>Orchestrator</a:t>
             </a:r>
           </a:p>
         </p:txBody>
@@ -5377,7 +5378,7 @@
                   <a:srgbClr val="444444"/>
                 </a:solidFill>
               </a:rPr>
-              <a:t>No tool call — reads plan details from conversation context</a:t>
+              <a:t>Sends SYSTEM_PROMPT + snapshot + full session history (types.Content) to Gemini</a:t>
             </a:r>
           </a:p>
         </p:txBody>
@@ -5569,7 +5570,7 @@
                   <a:srgbClr val="444444"/>
                 </a:solidFill>
               </a:rPr>
-              <a:t>Identifies candidate site density_weight and budget fit</a:t>
+              <a:t>No tool call — reads plan_network result from session history</a:t>
             </a:r>
           </a:p>
         </p:txBody>
@@ -5761,7 +5762,7 @@
                   <a:srgbClr val="444444"/>
                 </a:solidFill>
               </a:rPr>
-              <a:t>Explains SINR margin, PCI assignment, DU selection logic</a:t>
+              <a:t>Identifies candidate site density_weight and budget fit</a:t>
             </a:r>
           </a:p>
         </p:txBody>
@@ -5953,7 +5954,7 @@
                   <a:srgbClr val="444444"/>
                 </a:solidFill>
               </a:rPr>
-              <a:t>Generates natural language explanation of site selection</a:t>
+              <a:t>Explains SINR margin, PCI assignment, DU selection logic; loop exits (no tool calls)</a:t>
             </a:r>
           </a:p>
         </p:txBody>
@@ -6145,7 +6146,7 @@
                   <a:srgbClr val="444444"/>
                 </a:solidFill>
               </a:rPr>
-              <a:t>Returns HTTP response {reply} to chat.py</a:t>
+              <a:t>Streams text/plain chunks via sync generator (Starlette thread pool → StreamingResponse)</a:t>
             </a:r>
           </a:p>
         </p:txBody>
@@ -6337,7 +6338,7 @@
                   <a:srgbClr val="444444"/>
                 </a:solidFill>
               </a:rPr>
-              <a:t>Prints explanation to user</a:t>
+              <a:t>Prints streamed explanation to operator terminal</a:t>
             </a:r>
           </a:p>
         </p:txBody>
